--- a/submission/final-2026-10-18/Klarrow_Pitch_Deck.pptx
+++ b/submission/final-2026-10-18/Klarrow_Pitch_Deck.pptx
@@ -795,7 +795,7 @@
           <a:lstStyle/>
           <a:p>
             <a:r>
-              <a:t>This is the honesty slide. One authored scenario, one model, one operator, n=1. No accuracy, time-saving, customer or production claims.</a:t>
+              <a:t>This is the honesty slide. One authored scenario, one model, one operator, n=1. No accuracy, time-saving, customer or production claims. Separately, a locked three-scenario evaluation suite is green in deterministic mode; the local model passed two of three scenarios and on the third added only candidate-state links, never auto-confirmed. Do not present the suite as accuracy evidence.</a:t>
             </a:r>
           </a:p>
         </p:txBody>
@@ -16884,7 +16884,7 @@
                 </a:solidFill>
                 <a:latin typeface="Segoe UI"/>
               </a:rPr>
-              <a:t>We are deliberately showing the boundary, not hiding it.</a:t>
+              <a:t>We are deliberately showing the boundary, not hiding it - including a separate three-scenario evaluation suite (deterministic mode: 13/13 locked checks on all three).</a:t>
             </a:r>
           </a:p>
         </p:txBody>
